--- a/assets/fiches/B5-fiche-complet.pptx
+++ b/assets/fiches/B5-fiche-complet.pptx
@@ -3722,7 +3722,7 @@
                 </a:solidFill>
                 <a:latin typeface="Arial"/>
               </a:rPr>
-              <a:t>. Ce guide couvre toutes les étapes essentielles pour vous sentir à l'aise avec les services…</a:t>
+              <a:t>. Ce guide couvre toutes les étapes essentielles pour vous sentir à l'aise avec les services administratifs en ligne. Voici le programme :</a:t>
             </a:r>
           </a:p>
         </p:txBody>
@@ -3969,7 +3969,7 @@
                 </a:solidFill>
                 <a:latin typeface="Arial"/>
               </a:rPr>
-              <a:t>. Un espace personnel, c'est votre coin privé sur le site d'un organisme administratif. Une …</a:t>
+              <a:t>. Un espace personnel, c'est votre coin privé sur le site d'un organisme administratif. Une fois connecté, vous pouvez tout faire à distance, sans vous déplacer ni attendre en file d'attente.</a:t>
             </a:r>
           </a:p>
         </p:txBody>
@@ -4216,7 +4216,7 @@
                 </a:solidFill>
                 <a:latin typeface="Arial"/>
               </a:rPr>
-              <a:t>. Chaque organisme dispose de son propre espace en ligne. Voici un aperçu des plateformes le…</a:t>
+              <a:t>. Chaque organisme dispose de son propre espace en ligne. Voici un aperçu des plateformes les plus utilisées en France et de ce que chacune propose :</a:t>
             </a:r>
           </a:p>
         </p:txBody>
@@ -4463,7 +4463,7 @@
                 </a:solidFill>
                 <a:latin typeface="Arial"/>
               </a:rPr>
-              <a:t>. Ameli.fr est le portail de l'Assurance Maladie. Voici comment créer votre espace personnel…</a:t>
+              <a:t>. Ameli.fr est le portail de l'Assurance Maladie. Voici comment créer votre espace personnel étape par étape.</a:t>
             </a:r>
           </a:p>
         </p:txBody>
@@ -4710,7 +4710,7 @@
                 </a:solidFill>
                 <a:latin typeface="Arial"/>
               </a:rPr>
-              <a:t>. Le site impots.gouv.fr vous permet de déclarer vos revenus, consulter vos avis d'impositio…</a:t>
+              <a:t>. Le site impots.gouv.fr vous permet de déclarer vos revenus, consulter vos avis d'imposition et gérer votre prélèvement à la source. Voici ce qu'il faut pour créer votre espace.</a:t>
             </a:r>
           </a:p>
         </p:txBody>
@@ -4957,7 +4957,7 @@
                 </a:solidFill>
                 <a:latin typeface="Arial"/>
               </a:rPr>
-              <a:t>. Avant de créer vos espaces personnels, repérez ces numéros essentiels sur vos documents. V…</a:t>
+              <a:t>. Avant de créer vos espaces personnels, repérez ces numéros essentiels sur vos documents. Voici où les trouver facilement.</a:t>
             </a:r>
           </a:p>
         </p:txBody>
@@ -5698,7 +5698,7 @@
                 </a:solidFill>
                 <a:latin typeface="Arial"/>
               </a:rPr>
-              <a:t>. Votre mot de passe est la première barrière contre les accès non autorisés à vos données p…</a:t>
+              <a:t>. Votre mot de passe est la première barrière contre les accès non autorisés à vos données personnelles et financières. Prenez le temps de bien le choisir.</a:t>
             </a:r>
           </a:p>
         </p:txBody>
@@ -5971,7 +5971,7 @@
                 </a:solidFill>
                 <a:latin typeface="Arial"/>
               </a:rPr>
-              <a:t>. De plus en plus de sites administratifs proposent ou imposent la double authentification (…</a:t>
+              <a:t>. De plus en plus de sites administratifs proposent ou imposent la double authentification (aussi appelée 2FA). Ce mécanisme ajoute une deuxième vérification lors de votre connexion, en plus de votre mot de passe.</a:t>
             </a:r>
           </a:p>
         </p:txBody>
@@ -6218,7 +6218,7 @@
                 </a:solidFill>
                 <a:latin typeface="Arial"/>
               </a:rPr>
-              <a:t>. Votre espace personnel n'est utile que si les informations qu'il contient sont exactes et …</a:t>
+              <a:t>. Votre espace personnel n'est utile que si les informations qu'il contient sont exactes et à jour. Voici les données à vérifier régulièrement et comment les modifier en quelques clics.</a:t>
             </a:r>
           </a:p>
         </p:txBody>
@@ -6712,7 +6712,7 @@
                 </a:solidFill>
                 <a:latin typeface="Arial"/>
               </a:rPr>
-              <a:t>. Maintenant que votre espace est créé, voici quelques habitudes simples pour l'utiliser en …</a:t>
+              <a:t>. Maintenant que votre espace est créé, voici quelques habitudes simples pour l'utiliser en toute sécurité et en tirer le meilleur parti :</a:t>
             </a:r>
           </a:p>
         </p:txBody>
@@ -6959,7 +6959,7 @@
                 </a:solidFill>
                 <a:latin typeface="Arial"/>
               </a:rPr>
-              <a:t>. Créer et gérer votre espace personnel en ligne, c'est franchir un pas important vers plus …</a:t>
+              <a:t>. Créer et gérer votre espace personnel en ligne, c'est franchir un pas important vers plus d'autonomie dans vos démarches administratives. Plus de files d'attente, plus de formulaires papier perdus — tout est accessible, à toute heure, depuis chez vous.</a:t>
             </a:r>
           </a:p>
         </p:txBody>

--- a/assets/fiches/B5-fiche-complet.pptx
+++ b/assets/fiches/B5-fiche-complet.pptx
@@ -3097,9 +3097,35 @@
         <p:nvPr/>
       </p:nvGrpSpPr>
       <p:grpSpPr/>
-      <p:sp>
-        <p:nvSpPr>
-          <p:cNvPr id="2" name="TextBox 1"/>
+      <p:pic>
+        <p:nvPicPr>
+          <p:cNvPr id="2" name="Picture 1" descr="bg-p1.png"/>
+          <p:cNvPicPr>
+            <a:picLocks noChangeAspect="1"/>
+          </p:cNvPicPr>
+          <p:nvPr/>
+        </p:nvPicPr>
+        <p:blipFill>
+          <a:blip r:embed="rId2">
+            <a:alphaModFix amt="80000"/>
+          </a:blip>
+          <a:stretch>
+            <a:fillRect/>
+          </a:stretch>
+        </p:blipFill>
+        <p:spPr>
+          <a:xfrm>
+            <a:off x="0" y="0"/>
+            <a:ext cx="7556399" cy="10692000"/>
+          </a:xfrm>
+          <a:prstGeom prst="rect">
+            <a:avLst/>
+          </a:prstGeom>
+        </p:spPr>
+      </p:pic>
+      <p:sp>
+        <p:nvSpPr>
+          <p:cNvPr id="3" name="TextBox 2"/>
           <p:cNvSpPr txBox="1"/>
           <p:nvPr/>
         </p:nvSpPr>
@@ -3160,7 +3186,7 @@
       </p:sp>
       <p:sp>
         <p:nvSpPr>
-          <p:cNvPr id="3" name="Rectangle 2"/>
+          <p:cNvPr id="4" name="Rectangle 3"/>
           <p:cNvSpPr/>
           <p:nvPr/>
         </p:nvSpPr>
@@ -3203,7 +3229,7 @@
       </p:sp>
       <p:sp>
         <p:nvSpPr>
-          <p:cNvPr id="4" name="TextBox 3"/>
+          <p:cNvPr id="5" name="TextBox 4"/>
           <p:cNvSpPr txBox="1"/>
           <p:nvPr/>
         </p:nvSpPr>
@@ -3321,7 +3347,7 @@
       </p:sp>
       <p:sp>
         <p:nvSpPr>
-          <p:cNvPr id="5" name="Rectangle 4"/>
+          <p:cNvPr id="6" name="Rectangle 5"/>
           <p:cNvSpPr/>
           <p:nvPr/>
         </p:nvSpPr>
@@ -3364,7 +3390,7 @@
       </p:sp>
       <p:sp>
         <p:nvSpPr>
-          <p:cNvPr id="6" name="TextBox 5"/>
+          <p:cNvPr id="7" name="TextBox 6"/>
           <p:cNvSpPr txBox="1"/>
           <p:nvPr/>
         </p:nvSpPr>
@@ -3482,7 +3508,7 @@
       </p:sp>
       <p:sp>
         <p:nvSpPr>
-          <p:cNvPr id="7" name="Rectangle 6"/>
+          <p:cNvPr id="8" name="Rectangle 7"/>
           <p:cNvSpPr/>
           <p:nvPr/>
         </p:nvSpPr>
@@ -3525,7 +3551,7 @@
       </p:sp>
       <p:sp>
         <p:nvSpPr>
-          <p:cNvPr id="8" name="Rectangle 7"/>
+          <p:cNvPr id="9" name="Rectangle 8"/>
           <p:cNvSpPr/>
           <p:nvPr/>
         </p:nvSpPr>
@@ -3566,7 +3592,7 @@
       </p:sp>
       <p:sp>
         <p:nvSpPr>
-          <p:cNvPr id="9" name="Rectangle 8"/>
+          <p:cNvPr id="10" name="Rectangle 9"/>
           <p:cNvSpPr/>
           <p:nvPr/>
         </p:nvSpPr>
@@ -3607,7 +3633,7 @@
       </p:sp>
       <p:sp>
         <p:nvSpPr>
-          <p:cNvPr id="10" name="TextBox 9"/>
+          <p:cNvPr id="11" name="TextBox 10"/>
           <p:cNvSpPr txBox="1"/>
           <p:nvPr/>
         </p:nvSpPr>
@@ -3649,7 +3675,7 @@
       </p:sp>
       <p:sp>
         <p:nvSpPr>
-          <p:cNvPr id="11" name="TextBox 10"/>
+          <p:cNvPr id="12" name="TextBox 11"/>
           <p:cNvSpPr txBox="1"/>
           <p:nvPr/>
         </p:nvSpPr>
@@ -3729,7 +3755,7 @@
       </p:sp>
       <p:sp>
         <p:nvSpPr>
-          <p:cNvPr id="12" name="Rectangle 11"/>
+          <p:cNvPr id="13" name="Rectangle 12"/>
           <p:cNvSpPr/>
           <p:nvPr/>
         </p:nvSpPr>
@@ -3772,7 +3798,7 @@
       </p:sp>
       <p:sp>
         <p:nvSpPr>
-          <p:cNvPr id="13" name="Rectangle 12"/>
+          <p:cNvPr id="14" name="Rectangle 13"/>
           <p:cNvSpPr/>
           <p:nvPr/>
         </p:nvSpPr>
@@ -3813,7 +3839,7 @@
       </p:sp>
       <p:sp>
         <p:nvSpPr>
-          <p:cNvPr id="14" name="Rectangle 13"/>
+          <p:cNvPr id="15" name="Rectangle 14"/>
           <p:cNvSpPr/>
           <p:nvPr/>
         </p:nvSpPr>
@@ -3854,7 +3880,7 @@
       </p:sp>
       <p:sp>
         <p:nvSpPr>
-          <p:cNvPr id="15" name="TextBox 14"/>
+          <p:cNvPr id="16" name="TextBox 15"/>
           <p:cNvSpPr txBox="1"/>
           <p:nvPr/>
         </p:nvSpPr>
@@ -3896,7 +3922,7 @@
       </p:sp>
       <p:sp>
         <p:nvSpPr>
-          <p:cNvPr id="16" name="TextBox 15"/>
+          <p:cNvPr id="17" name="TextBox 16"/>
           <p:cNvSpPr txBox="1"/>
           <p:nvPr/>
         </p:nvSpPr>
@@ -3976,7 +4002,7 @@
       </p:sp>
       <p:sp>
         <p:nvSpPr>
-          <p:cNvPr id="17" name="Rectangle 16"/>
+          <p:cNvPr id="18" name="Rectangle 17"/>
           <p:cNvSpPr/>
           <p:nvPr/>
         </p:nvSpPr>
@@ -4019,7 +4045,7 @@
       </p:sp>
       <p:sp>
         <p:nvSpPr>
-          <p:cNvPr id="18" name="Rectangle 17"/>
+          <p:cNvPr id="19" name="Rectangle 18"/>
           <p:cNvSpPr/>
           <p:nvPr/>
         </p:nvSpPr>
@@ -4060,7 +4086,7 @@
       </p:sp>
       <p:sp>
         <p:nvSpPr>
-          <p:cNvPr id="19" name="Rectangle 18"/>
+          <p:cNvPr id="20" name="Rectangle 19"/>
           <p:cNvSpPr/>
           <p:nvPr/>
         </p:nvSpPr>
@@ -4101,7 +4127,7 @@
       </p:sp>
       <p:sp>
         <p:nvSpPr>
-          <p:cNvPr id="20" name="TextBox 19"/>
+          <p:cNvPr id="21" name="TextBox 20"/>
           <p:cNvSpPr txBox="1"/>
           <p:nvPr/>
         </p:nvSpPr>
@@ -4143,7 +4169,7 @@
       </p:sp>
       <p:sp>
         <p:nvSpPr>
-          <p:cNvPr id="21" name="TextBox 20"/>
+          <p:cNvPr id="22" name="TextBox 21"/>
           <p:cNvSpPr txBox="1"/>
           <p:nvPr/>
         </p:nvSpPr>
@@ -4223,7 +4249,7 @@
       </p:sp>
       <p:sp>
         <p:nvSpPr>
-          <p:cNvPr id="22" name="Rectangle 21"/>
+          <p:cNvPr id="23" name="Rectangle 22"/>
           <p:cNvSpPr/>
           <p:nvPr/>
         </p:nvSpPr>
@@ -4266,7 +4292,7 @@
       </p:sp>
       <p:sp>
         <p:nvSpPr>
-          <p:cNvPr id="23" name="Rectangle 22"/>
+          <p:cNvPr id="24" name="Rectangle 23"/>
           <p:cNvSpPr/>
           <p:nvPr/>
         </p:nvSpPr>
@@ -4307,7 +4333,7 @@
       </p:sp>
       <p:sp>
         <p:nvSpPr>
-          <p:cNvPr id="24" name="Rectangle 23"/>
+          <p:cNvPr id="25" name="Rectangle 24"/>
           <p:cNvSpPr/>
           <p:nvPr/>
         </p:nvSpPr>
@@ -4348,7 +4374,7 @@
       </p:sp>
       <p:sp>
         <p:nvSpPr>
-          <p:cNvPr id="25" name="TextBox 24"/>
+          <p:cNvPr id="26" name="TextBox 25"/>
           <p:cNvSpPr txBox="1"/>
           <p:nvPr/>
         </p:nvSpPr>
@@ -4390,7 +4416,7 @@
       </p:sp>
       <p:sp>
         <p:nvSpPr>
-          <p:cNvPr id="26" name="TextBox 25"/>
+          <p:cNvPr id="27" name="TextBox 26"/>
           <p:cNvSpPr txBox="1"/>
           <p:nvPr/>
         </p:nvSpPr>
@@ -4470,7 +4496,7 @@
       </p:sp>
       <p:sp>
         <p:nvSpPr>
-          <p:cNvPr id="27" name="Rectangle 26"/>
+          <p:cNvPr id="28" name="Rectangle 27"/>
           <p:cNvSpPr/>
           <p:nvPr/>
         </p:nvSpPr>
@@ -4513,7 +4539,7 @@
       </p:sp>
       <p:sp>
         <p:nvSpPr>
-          <p:cNvPr id="28" name="Rectangle 27"/>
+          <p:cNvPr id="29" name="Rectangle 28"/>
           <p:cNvSpPr/>
           <p:nvPr/>
         </p:nvSpPr>
@@ -4554,7 +4580,7 @@
       </p:sp>
       <p:sp>
         <p:nvSpPr>
-          <p:cNvPr id="29" name="Rectangle 28"/>
+          <p:cNvPr id="30" name="Rectangle 29"/>
           <p:cNvSpPr/>
           <p:nvPr/>
         </p:nvSpPr>
@@ -4595,7 +4621,7 @@
       </p:sp>
       <p:sp>
         <p:nvSpPr>
-          <p:cNvPr id="30" name="TextBox 29"/>
+          <p:cNvPr id="31" name="TextBox 30"/>
           <p:cNvSpPr txBox="1"/>
           <p:nvPr/>
         </p:nvSpPr>
@@ -4637,7 +4663,7 @@
       </p:sp>
       <p:sp>
         <p:nvSpPr>
-          <p:cNvPr id="31" name="TextBox 30"/>
+          <p:cNvPr id="32" name="TextBox 31"/>
           <p:cNvSpPr txBox="1"/>
           <p:nvPr/>
         </p:nvSpPr>
@@ -4717,7 +4743,7 @@
       </p:sp>
       <p:sp>
         <p:nvSpPr>
-          <p:cNvPr id="32" name="Rectangle 31"/>
+          <p:cNvPr id="33" name="Rectangle 32"/>
           <p:cNvSpPr/>
           <p:nvPr/>
         </p:nvSpPr>
@@ -4760,7 +4786,7 @@
       </p:sp>
       <p:sp>
         <p:nvSpPr>
-          <p:cNvPr id="33" name="Rectangle 32"/>
+          <p:cNvPr id="34" name="Rectangle 33"/>
           <p:cNvSpPr/>
           <p:nvPr/>
         </p:nvSpPr>
@@ -4801,7 +4827,7 @@
       </p:sp>
       <p:sp>
         <p:nvSpPr>
-          <p:cNvPr id="34" name="Rectangle 33"/>
+          <p:cNvPr id="35" name="Rectangle 34"/>
           <p:cNvSpPr/>
           <p:nvPr/>
         </p:nvSpPr>
@@ -4842,7 +4868,7 @@
       </p:sp>
       <p:sp>
         <p:nvSpPr>
-          <p:cNvPr id="35" name="TextBox 34"/>
+          <p:cNvPr id="36" name="TextBox 35"/>
           <p:cNvSpPr txBox="1"/>
           <p:nvPr/>
         </p:nvSpPr>
@@ -4884,7 +4910,7 @@
       </p:sp>
       <p:sp>
         <p:nvSpPr>
-          <p:cNvPr id="36" name="TextBox 35"/>
+          <p:cNvPr id="37" name="TextBox 36"/>
           <p:cNvSpPr txBox="1"/>
           <p:nvPr/>
         </p:nvSpPr>
@@ -4964,7 +4990,7 @@
       </p:sp>
       <p:sp>
         <p:nvSpPr>
-          <p:cNvPr id="37" name="Rectangle 36"/>
+          <p:cNvPr id="38" name="Rectangle 37"/>
           <p:cNvSpPr/>
           <p:nvPr/>
         </p:nvSpPr>
@@ -5007,7 +5033,7 @@
       </p:sp>
       <p:sp>
         <p:nvSpPr>
-          <p:cNvPr id="38" name="Rectangle 37"/>
+          <p:cNvPr id="39" name="Rectangle 38"/>
           <p:cNvSpPr/>
           <p:nvPr/>
         </p:nvSpPr>
@@ -5048,7 +5074,7 @@
       </p:sp>
       <p:sp>
         <p:nvSpPr>
-          <p:cNvPr id="39" name="Rectangle 38"/>
+          <p:cNvPr id="40" name="Rectangle 39"/>
           <p:cNvSpPr/>
           <p:nvPr/>
         </p:nvSpPr>
@@ -5089,7 +5115,7 @@
       </p:sp>
       <p:sp>
         <p:nvSpPr>
-          <p:cNvPr id="40" name="TextBox 39"/>
+          <p:cNvPr id="41" name="TextBox 40"/>
           <p:cNvSpPr txBox="1"/>
           <p:nvPr/>
         </p:nvSpPr>
@@ -5131,7 +5157,7 @@
       </p:sp>
       <p:sp>
         <p:nvSpPr>
-          <p:cNvPr id="41" name="TextBox 40"/>
+          <p:cNvPr id="42" name="TextBox 41"/>
           <p:cNvSpPr txBox="1"/>
           <p:nvPr/>
         </p:nvSpPr>
@@ -5211,7 +5237,7 @@
       </p:sp>
       <p:sp>
         <p:nvSpPr>
-          <p:cNvPr id="42" name="Rectangle 41"/>
+          <p:cNvPr id="43" name="Rectangle 42"/>
           <p:cNvSpPr/>
           <p:nvPr/>
         </p:nvSpPr>
@@ -5254,7 +5280,7 @@
       </p:sp>
       <p:sp>
         <p:nvSpPr>
-          <p:cNvPr id="43" name="Rectangle 42"/>
+          <p:cNvPr id="44" name="Rectangle 43"/>
           <p:cNvSpPr/>
           <p:nvPr/>
         </p:nvSpPr>
@@ -5295,7 +5321,7 @@
       </p:sp>
       <p:sp>
         <p:nvSpPr>
-          <p:cNvPr id="44" name="Rectangle 43"/>
+          <p:cNvPr id="45" name="Rectangle 44"/>
           <p:cNvSpPr/>
           <p:nvPr/>
         </p:nvSpPr>
@@ -5336,7 +5362,7 @@
       </p:sp>
       <p:sp>
         <p:nvSpPr>
-          <p:cNvPr id="45" name="TextBox 44"/>
+          <p:cNvPr id="46" name="TextBox 45"/>
           <p:cNvSpPr txBox="1"/>
           <p:nvPr/>
         </p:nvSpPr>
@@ -5378,7 +5404,7 @@
       </p:sp>
       <p:sp>
         <p:nvSpPr>
-          <p:cNvPr id="46" name="TextBox 45"/>
+          <p:cNvPr id="47" name="TextBox 46"/>
           <p:cNvSpPr txBox="1"/>
           <p:nvPr/>
         </p:nvSpPr>
@@ -5458,7 +5484,7 @@
       </p:sp>
       <p:sp>
         <p:nvSpPr>
-          <p:cNvPr id="47" name="Rectangle 46"/>
+          <p:cNvPr id="48" name="Rectangle 47"/>
           <p:cNvSpPr/>
           <p:nvPr/>
         </p:nvSpPr>
@@ -5501,7 +5527,7 @@
       </p:sp>
       <p:sp>
         <p:nvSpPr>
-          <p:cNvPr id="48" name="Rectangle 47"/>
+          <p:cNvPr id="49" name="Rectangle 48"/>
           <p:cNvSpPr/>
           <p:nvPr/>
         </p:nvSpPr>
@@ -5542,7 +5568,7 @@
       </p:sp>
       <p:sp>
         <p:nvSpPr>
-          <p:cNvPr id="49" name="Rectangle 48"/>
+          <p:cNvPr id="50" name="Rectangle 49"/>
           <p:cNvSpPr/>
           <p:nvPr/>
         </p:nvSpPr>
@@ -5583,7 +5609,7 @@
       </p:sp>
       <p:sp>
         <p:nvSpPr>
-          <p:cNvPr id="50" name="TextBox 49"/>
+          <p:cNvPr id="51" name="TextBox 50"/>
           <p:cNvSpPr txBox="1"/>
           <p:nvPr/>
         </p:nvSpPr>
@@ -5625,7 +5651,7 @@
       </p:sp>
       <p:sp>
         <p:nvSpPr>
-          <p:cNvPr id="51" name="TextBox 50"/>
+          <p:cNvPr id="52" name="TextBox 51"/>
           <p:cNvSpPr txBox="1"/>
           <p:nvPr/>
         </p:nvSpPr>
@@ -5729,9 +5755,35 @@
         <p:nvPr/>
       </p:nvGrpSpPr>
       <p:grpSpPr/>
-      <p:sp>
-        <p:nvSpPr>
-          <p:cNvPr id="2" name="Rectangle 1"/>
+      <p:pic>
+        <p:nvPicPr>
+          <p:cNvPr id="2" name="Picture 1" descr="bg-p2.png"/>
+          <p:cNvPicPr>
+            <a:picLocks noChangeAspect="1"/>
+          </p:cNvPicPr>
+          <p:nvPr/>
+        </p:nvPicPr>
+        <p:blipFill>
+          <a:blip r:embed="rId2">
+            <a:alphaModFix amt="80000"/>
+          </a:blip>
+          <a:stretch>
+            <a:fillRect/>
+          </a:stretch>
+        </p:blipFill>
+        <p:spPr>
+          <a:xfrm>
+            <a:off x="0" y="0"/>
+            <a:ext cx="7556399" cy="10692000"/>
+          </a:xfrm>
+          <a:prstGeom prst="rect">
+            <a:avLst/>
+          </a:prstGeom>
+        </p:spPr>
+      </p:pic>
+      <p:sp>
+        <p:nvSpPr>
+          <p:cNvPr id="3" name="Rectangle 2"/>
           <p:cNvSpPr/>
           <p:nvPr/>
         </p:nvSpPr>
@@ -5774,7 +5826,7 @@
       </p:sp>
       <p:sp>
         <p:nvSpPr>
-          <p:cNvPr id="3" name="Rectangle 2"/>
+          <p:cNvPr id="4" name="Rectangle 3"/>
           <p:cNvSpPr/>
           <p:nvPr/>
         </p:nvSpPr>
@@ -5815,7 +5867,7 @@
       </p:sp>
       <p:sp>
         <p:nvSpPr>
-          <p:cNvPr id="4" name="Rectangle 3"/>
+          <p:cNvPr id="5" name="Rectangle 4"/>
           <p:cNvSpPr/>
           <p:nvPr/>
         </p:nvSpPr>
@@ -5856,7 +5908,7 @@
       </p:sp>
       <p:sp>
         <p:nvSpPr>
-          <p:cNvPr id="5" name="TextBox 4"/>
+          <p:cNvPr id="6" name="TextBox 5"/>
           <p:cNvSpPr txBox="1"/>
           <p:nvPr/>
         </p:nvSpPr>
@@ -5898,7 +5950,7 @@
       </p:sp>
       <p:sp>
         <p:nvSpPr>
-          <p:cNvPr id="6" name="TextBox 5"/>
+          <p:cNvPr id="7" name="TextBox 6"/>
           <p:cNvSpPr txBox="1"/>
           <p:nvPr/>
         </p:nvSpPr>
@@ -5978,7 +6030,7 @@
       </p:sp>
       <p:sp>
         <p:nvSpPr>
-          <p:cNvPr id="7" name="Rectangle 6"/>
+          <p:cNvPr id="8" name="Rectangle 7"/>
           <p:cNvSpPr/>
           <p:nvPr/>
         </p:nvSpPr>
@@ -6021,7 +6073,7 @@
       </p:sp>
       <p:sp>
         <p:nvSpPr>
-          <p:cNvPr id="8" name="Rectangle 7"/>
+          <p:cNvPr id="9" name="Rectangle 8"/>
           <p:cNvSpPr/>
           <p:nvPr/>
         </p:nvSpPr>
@@ -6062,7 +6114,7 @@
       </p:sp>
       <p:sp>
         <p:nvSpPr>
-          <p:cNvPr id="9" name="Rectangle 8"/>
+          <p:cNvPr id="10" name="Rectangle 9"/>
           <p:cNvSpPr/>
           <p:nvPr/>
         </p:nvSpPr>
@@ -6103,7 +6155,7 @@
       </p:sp>
       <p:sp>
         <p:nvSpPr>
-          <p:cNvPr id="10" name="TextBox 9"/>
+          <p:cNvPr id="11" name="TextBox 10"/>
           <p:cNvSpPr txBox="1"/>
           <p:nvPr/>
         </p:nvSpPr>
@@ -6145,7 +6197,7 @@
       </p:sp>
       <p:sp>
         <p:nvSpPr>
-          <p:cNvPr id="11" name="TextBox 10"/>
+          <p:cNvPr id="12" name="TextBox 11"/>
           <p:cNvSpPr txBox="1"/>
           <p:nvPr/>
         </p:nvSpPr>
@@ -6225,7 +6277,7 @@
       </p:sp>
       <p:sp>
         <p:nvSpPr>
-          <p:cNvPr id="12" name="Rectangle 11"/>
+          <p:cNvPr id="13" name="Rectangle 12"/>
           <p:cNvSpPr/>
           <p:nvPr/>
         </p:nvSpPr>
@@ -6268,7 +6320,7 @@
       </p:sp>
       <p:sp>
         <p:nvSpPr>
-          <p:cNvPr id="13" name="Rectangle 12"/>
+          <p:cNvPr id="14" name="Rectangle 13"/>
           <p:cNvSpPr/>
           <p:nvPr/>
         </p:nvSpPr>
@@ -6309,7 +6361,7 @@
       </p:sp>
       <p:sp>
         <p:nvSpPr>
-          <p:cNvPr id="14" name="Rectangle 13"/>
+          <p:cNvPr id="15" name="Rectangle 14"/>
           <p:cNvSpPr/>
           <p:nvPr/>
         </p:nvSpPr>
@@ -6350,7 +6402,7 @@
       </p:sp>
       <p:sp>
         <p:nvSpPr>
-          <p:cNvPr id="15" name="TextBox 14"/>
+          <p:cNvPr id="16" name="TextBox 15"/>
           <p:cNvSpPr txBox="1"/>
           <p:nvPr/>
         </p:nvSpPr>
@@ -6392,7 +6444,7 @@
       </p:sp>
       <p:sp>
         <p:nvSpPr>
-          <p:cNvPr id="16" name="TextBox 15"/>
+          <p:cNvPr id="17" name="TextBox 16"/>
           <p:cNvSpPr txBox="1"/>
           <p:nvPr/>
         </p:nvSpPr>
@@ -6472,7 +6524,7 @@
       </p:sp>
       <p:sp>
         <p:nvSpPr>
-          <p:cNvPr id="17" name="Rectangle 16"/>
+          <p:cNvPr id="18" name="Rectangle 17"/>
           <p:cNvSpPr/>
           <p:nvPr/>
         </p:nvSpPr>
@@ -6515,7 +6567,7 @@
       </p:sp>
       <p:sp>
         <p:nvSpPr>
-          <p:cNvPr id="18" name="Rectangle 17"/>
+          <p:cNvPr id="19" name="Rectangle 18"/>
           <p:cNvSpPr/>
           <p:nvPr/>
         </p:nvSpPr>
@@ -6556,7 +6608,7 @@
       </p:sp>
       <p:sp>
         <p:nvSpPr>
-          <p:cNvPr id="19" name="Rectangle 18"/>
+          <p:cNvPr id="20" name="Rectangle 19"/>
           <p:cNvSpPr/>
           <p:nvPr/>
         </p:nvSpPr>
@@ -6597,7 +6649,7 @@
       </p:sp>
       <p:sp>
         <p:nvSpPr>
-          <p:cNvPr id="20" name="TextBox 19"/>
+          <p:cNvPr id="21" name="TextBox 20"/>
           <p:cNvSpPr txBox="1"/>
           <p:nvPr/>
         </p:nvSpPr>
@@ -6639,7 +6691,7 @@
       </p:sp>
       <p:sp>
         <p:nvSpPr>
-          <p:cNvPr id="21" name="TextBox 20"/>
+          <p:cNvPr id="22" name="TextBox 21"/>
           <p:cNvSpPr txBox="1"/>
           <p:nvPr/>
         </p:nvSpPr>
@@ -6719,7 +6771,7 @@
       </p:sp>
       <p:sp>
         <p:nvSpPr>
-          <p:cNvPr id="22" name="Rectangle 21"/>
+          <p:cNvPr id="23" name="Rectangle 22"/>
           <p:cNvSpPr/>
           <p:nvPr/>
         </p:nvSpPr>
@@ -6762,7 +6814,7 @@
       </p:sp>
       <p:sp>
         <p:nvSpPr>
-          <p:cNvPr id="23" name="Rectangle 22"/>
+          <p:cNvPr id="24" name="Rectangle 23"/>
           <p:cNvSpPr/>
           <p:nvPr/>
         </p:nvSpPr>
@@ -6803,7 +6855,7 @@
       </p:sp>
       <p:sp>
         <p:nvSpPr>
-          <p:cNvPr id="24" name="Rectangle 23"/>
+          <p:cNvPr id="25" name="Rectangle 24"/>
           <p:cNvSpPr/>
           <p:nvPr/>
         </p:nvSpPr>
@@ -6844,7 +6896,7 @@
       </p:sp>
       <p:sp>
         <p:nvSpPr>
-          <p:cNvPr id="25" name="TextBox 24"/>
+          <p:cNvPr id="26" name="TextBox 25"/>
           <p:cNvSpPr txBox="1"/>
           <p:nvPr/>
         </p:nvSpPr>
@@ -6886,7 +6938,7 @@
       </p:sp>
       <p:sp>
         <p:nvSpPr>
-          <p:cNvPr id="26" name="TextBox 25"/>
+          <p:cNvPr id="27" name="TextBox 26"/>
           <p:cNvSpPr txBox="1"/>
           <p:nvPr/>
         </p:nvSpPr>
@@ -6966,7 +7018,7 @@
       </p:sp>
       <p:sp>
         <p:nvSpPr>
-          <p:cNvPr id="27" name="Rectangle 26"/>
+          <p:cNvPr id="28" name="Rectangle 27"/>
           <p:cNvSpPr/>
           <p:nvPr/>
         </p:nvSpPr>
@@ -7007,7 +7059,7 @@
       </p:sp>
       <p:sp>
         <p:nvSpPr>
-          <p:cNvPr id="28" name="TextBox 27"/>
+          <p:cNvPr id="29" name="TextBox 28"/>
           <p:cNvSpPr txBox="1"/>
           <p:nvPr/>
         </p:nvSpPr>

--- a/assets/fiches/B5-fiche-complet.pptx
+++ b/assets/fiches/B5-fiche-complet.pptx
@@ -3084,9 +3084,12 @@
   <p:cSld>
     <p:bg>
       <p:bgPr>
-        <a:solidFill>
-          <a:srgbClr val="FFFFFF"/>
-        </a:solidFill>
+        <a:blipFill>
+          <a:blip r:embed="rId2"/>
+          <a:stretch>
+            <a:fillRect/>
+          </a:stretch>
+        </a:blipFill>
         <a:effectLst/>
       </p:bgPr>
     </p:bg>
@@ -3097,35 +3100,9 @@
         <p:nvPr/>
       </p:nvGrpSpPr>
       <p:grpSpPr/>
-      <p:pic>
-        <p:nvPicPr>
-          <p:cNvPr id="2" name="Picture 1" descr="bg-p1.png"/>
-          <p:cNvPicPr>
-            <a:picLocks noChangeAspect="1"/>
-          </p:cNvPicPr>
-          <p:nvPr/>
-        </p:nvPicPr>
-        <p:blipFill>
-          <a:blip r:embed="rId2">
-            <a:alphaModFix amt="80000"/>
-          </a:blip>
-          <a:stretch>
-            <a:fillRect/>
-          </a:stretch>
-        </p:blipFill>
-        <p:spPr>
-          <a:xfrm>
-            <a:off x="0" y="0"/>
-            <a:ext cx="7556399" cy="10692000"/>
-          </a:xfrm>
-          <a:prstGeom prst="rect">
-            <a:avLst/>
-          </a:prstGeom>
-        </p:spPr>
-      </p:pic>
-      <p:sp>
-        <p:nvSpPr>
-          <p:cNvPr id="3" name="TextBox 2"/>
+      <p:sp>
+        <p:nvSpPr>
+          <p:cNvPr id="2" name="TextBox 1"/>
           <p:cNvSpPr txBox="1"/>
           <p:nvPr/>
         </p:nvSpPr>
@@ -3186,7 +3163,7 @@
       </p:sp>
       <p:sp>
         <p:nvSpPr>
-          <p:cNvPr id="4" name="Rectangle 3"/>
+          <p:cNvPr id="3" name="Rectangle 2"/>
           <p:cNvSpPr/>
           <p:nvPr/>
         </p:nvSpPr>
@@ -3229,7 +3206,7 @@
       </p:sp>
       <p:sp>
         <p:nvSpPr>
-          <p:cNvPr id="5" name="TextBox 4"/>
+          <p:cNvPr id="4" name="TextBox 3"/>
           <p:cNvSpPr txBox="1"/>
           <p:nvPr/>
         </p:nvSpPr>
@@ -3347,7 +3324,7 @@
       </p:sp>
       <p:sp>
         <p:nvSpPr>
-          <p:cNvPr id="6" name="Rectangle 5"/>
+          <p:cNvPr id="5" name="Rectangle 4"/>
           <p:cNvSpPr/>
           <p:nvPr/>
         </p:nvSpPr>
@@ -3390,7 +3367,7 @@
       </p:sp>
       <p:sp>
         <p:nvSpPr>
-          <p:cNvPr id="7" name="TextBox 6"/>
+          <p:cNvPr id="6" name="TextBox 5"/>
           <p:cNvSpPr txBox="1"/>
           <p:nvPr/>
         </p:nvSpPr>
@@ -3508,7 +3485,7 @@
       </p:sp>
       <p:sp>
         <p:nvSpPr>
-          <p:cNvPr id="8" name="Rectangle 7"/>
+          <p:cNvPr id="7" name="Rectangle 6"/>
           <p:cNvSpPr/>
           <p:nvPr/>
         </p:nvSpPr>
@@ -3551,7 +3528,7 @@
       </p:sp>
       <p:sp>
         <p:nvSpPr>
-          <p:cNvPr id="9" name="Rectangle 8"/>
+          <p:cNvPr id="8" name="Rectangle 7"/>
           <p:cNvSpPr/>
           <p:nvPr/>
         </p:nvSpPr>
@@ -3592,7 +3569,7 @@
       </p:sp>
       <p:sp>
         <p:nvSpPr>
-          <p:cNvPr id="10" name="Rectangle 9"/>
+          <p:cNvPr id="9" name="Rectangle 8"/>
           <p:cNvSpPr/>
           <p:nvPr/>
         </p:nvSpPr>
@@ -3633,7 +3610,7 @@
       </p:sp>
       <p:sp>
         <p:nvSpPr>
-          <p:cNvPr id="11" name="TextBox 10"/>
+          <p:cNvPr id="10" name="TextBox 9"/>
           <p:cNvSpPr txBox="1"/>
           <p:nvPr/>
         </p:nvSpPr>
@@ -3675,7 +3652,7 @@
       </p:sp>
       <p:sp>
         <p:nvSpPr>
-          <p:cNvPr id="12" name="TextBox 11"/>
+          <p:cNvPr id="11" name="TextBox 10"/>
           <p:cNvSpPr txBox="1"/>
           <p:nvPr/>
         </p:nvSpPr>
@@ -3755,7 +3732,7 @@
       </p:sp>
       <p:sp>
         <p:nvSpPr>
-          <p:cNvPr id="13" name="Rectangle 12"/>
+          <p:cNvPr id="12" name="Rectangle 11"/>
           <p:cNvSpPr/>
           <p:nvPr/>
         </p:nvSpPr>
@@ -3798,7 +3775,7 @@
       </p:sp>
       <p:sp>
         <p:nvSpPr>
-          <p:cNvPr id="14" name="Rectangle 13"/>
+          <p:cNvPr id="13" name="Rectangle 12"/>
           <p:cNvSpPr/>
           <p:nvPr/>
         </p:nvSpPr>
@@ -3839,7 +3816,7 @@
       </p:sp>
       <p:sp>
         <p:nvSpPr>
-          <p:cNvPr id="15" name="Rectangle 14"/>
+          <p:cNvPr id="14" name="Rectangle 13"/>
           <p:cNvSpPr/>
           <p:nvPr/>
         </p:nvSpPr>
@@ -3880,7 +3857,7 @@
       </p:sp>
       <p:sp>
         <p:nvSpPr>
-          <p:cNvPr id="16" name="TextBox 15"/>
+          <p:cNvPr id="15" name="TextBox 14"/>
           <p:cNvSpPr txBox="1"/>
           <p:nvPr/>
         </p:nvSpPr>
@@ -3922,7 +3899,7 @@
       </p:sp>
       <p:sp>
         <p:nvSpPr>
-          <p:cNvPr id="17" name="TextBox 16"/>
+          <p:cNvPr id="16" name="TextBox 15"/>
           <p:cNvSpPr txBox="1"/>
           <p:nvPr/>
         </p:nvSpPr>
@@ -4002,7 +3979,7 @@
       </p:sp>
       <p:sp>
         <p:nvSpPr>
-          <p:cNvPr id="18" name="Rectangle 17"/>
+          <p:cNvPr id="17" name="Rectangle 16"/>
           <p:cNvSpPr/>
           <p:nvPr/>
         </p:nvSpPr>
@@ -4045,7 +4022,7 @@
       </p:sp>
       <p:sp>
         <p:nvSpPr>
-          <p:cNvPr id="19" name="Rectangle 18"/>
+          <p:cNvPr id="18" name="Rectangle 17"/>
           <p:cNvSpPr/>
           <p:nvPr/>
         </p:nvSpPr>
@@ -4086,7 +4063,7 @@
       </p:sp>
       <p:sp>
         <p:nvSpPr>
-          <p:cNvPr id="20" name="Rectangle 19"/>
+          <p:cNvPr id="19" name="Rectangle 18"/>
           <p:cNvSpPr/>
           <p:nvPr/>
         </p:nvSpPr>
@@ -4127,7 +4104,7 @@
       </p:sp>
       <p:sp>
         <p:nvSpPr>
-          <p:cNvPr id="21" name="TextBox 20"/>
+          <p:cNvPr id="20" name="TextBox 19"/>
           <p:cNvSpPr txBox="1"/>
           <p:nvPr/>
         </p:nvSpPr>
@@ -4169,7 +4146,7 @@
       </p:sp>
       <p:sp>
         <p:nvSpPr>
-          <p:cNvPr id="22" name="TextBox 21"/>
+          <p:cNvPr id="21" name="TextBox 20"/>
           <p:cNvSpPr txBox="1"/>
           <p:nvPr/>
         </p:nvSpPr>
@@ -4249,7 +4226,7 @@
       </p:sp>
       <p:sp>
         <p:nvSpPr>
-          <p:cNvPr id="23" name="Rectangle 22"/>
+          <p:cNvPr id="22" name="Rectangle 21"/>
           <p:cNvSpPr/>
           <p:nvPr/>
         </p:nvSpPr>
@@ -4292,7 +4269,7 @@
       </p:sp>
       <p:sp>
         <p:nvSpPr>
-          <p:cNvPr id="24" name="Rectangle 23"/>
+          <p:cNvPr id="23" name="Rectangle 22"/>
           <p:cNvSpPr/>
           <p:nvPr/>
         </p:nvSpPr>
@@ -4333,7 +4310,7 @@
       </p:sp>
       <p:sp>
         <p:nvSpPr>
-          <p:cNvPr id="25" name="Rectangle 24"/>
+          <p:cNvPr id="24" name="Rectangle 23"/>
           <p:cNvSpPr/>
           <p:nvPr/>
         </p:nvSpPr>
@@ -4374,7 +4351,7 @@
       </p:sp>
       <p:sp>
         <p:nvSpPr>
-          <p:cNvPr id="26" name="TextBox 25"/>
+          <p:cNvPr id="25" name="TextBox 24"/>
           <p:cNvSpPr txBox="1"/>
           <p:nvPr/>
         </p:nvSpPr>
@@ -4416,7 +4393,7 @@
       </p:sp>
       <p:sp>
         <p:nvSpPr>
-          <p:cNvPr id="27" name="TextBox 26"/>
+          <p:cNvPr id="26" name="TextBox 25"/>
           <p:cNvSpPr txBox="1"/>
           <p:nvPr/>
         </p:nvSpPr>
@@ -4496,7 +4473,7 @@
       </p:sp>
       <p:sp>
         <p:nvSpPr>
-          <p:cNvPr id="28" name="Rectangle 27"/>
+          <p:cNvPr id="27" name="Rectangle 26"/>
           <p:cNvSpPr/>
           <p:nvPr/>
         </p:nvSpPr>
@@ -4539,7 +4516,7 @@
       </p:sp>
       <p:sp>
         <p:nvSpPr>
-          <p:cNvPr id="29" name="Rectangle 28"/>
+          <p:cNvPr id="28" name="Rectangle 27"/>
           <p:cNvSpPr/>
           <p:nvPr/>
         </p:nvSpPr>
@@ -4580,7 +4557,7 @@
       </p:sp>
       <p:sp>
         <p:nvSpPr>
-          <p:cNvPr id="30" name="Rectangle 29"/>
+          <p:cNvPr id="29" name="Rectangle 28"/>
           <p:cNvSpPr/>
           <p:nvPr/>
         </p:nvSpPr>
@@ -4621,7 +4598,7 @@
       </p:sp>
       <p:sp>
         <p:nvSpPr>
-          <p:cNvPr id="31" name="TextBox 30"/>
+          <p:cNvPr id="30" name="TextBox 29"/>
           <p:cNvSpPr txBox="1"/>
           <p:nvPr/>
         </p:nvSpPr>
@@ -4663,7 +4640,7 @@
       </p:sp>
       <p:sp>
         <p:nvSpPr>
-          <p:cNvPr id="32" name="TextBox 31"/>
+          <p:cNvPr id="31" name="TextBox 30"/>
           <p:cNvSpPr txBox="1"/>
           <p:nvPr/>
         </p:nvSpPr>
@@ -4743,7 +4720,7 @@
       </p:sp>
       <p:sp>
         <p:nvSpPr>
-          <p:cNvPr id="33" name="Rectangle 32"/>
+          <p:cNvPr id="32" name="Rectangle 31"/>
           <p:cNvSpPr/>
           <p:nvPr/>
         </p:nvSpPr>
@@ -4786,7 +4763,7 @@
       </p:sp>
       <p:sp>
         <p:nvSpPr>
-          <p:cNvPr id="34" name="Rectangle 33"/>
+          <p:cNvPr id="33" name="Rectangle 32"/>
           <p:cNvSpPr/>
           <p:nvPr/>
         </p:nvSpPr>
@@ -4827,7 +4804,7 @@
       </p:sp>
       <p:sp>
         <p:nvSpPr>
-          <p:cNvPr id="35" name="Rectangle 34"/>
+          <p:cNvPr id="34" name="Rectangle 33"/>
           <p:cNvSpPr/>
           <p:nvPr/>
         </p:nvSpPr>
@@ -4868,7 +4845,7 @@
       </p:sp>
       <p:sp>
         <p:nvSpPr>
-          <p:cNvPr id="36" name="TextBox 35"/>
+          <p:cNvPr id="35" name="TextBox 34"/>
           <p:cNvSpPr txBox="1"/>
           <p:nvPr/>
         </p:nvSpPr>
@@ -4910,7 +4887,7 @@
       </p:sp>
       <p:sp>
         <p:nvSpPr>
-          <p:cNvPr id="37" name="TextBox 36"/>
+          <p:cNvPr id="36" name="TextBox 35"/>
           <p:cNvSpPr txBox="1"/>
           <p:nvPr/>
         </p:nvSpPr>
@@ -4990,7 +4967,7 @@
       </p:sp>
       <p:sp>
         <p:nvSpPr>
-          <p:cNvPr id="38" name="Rectangle 37"/>
+          <p:cNvPr id="37" name="Rectangle 36"/>
           <p:cNvSpPr/>
           <p:nvPr/>
         </p:nvSpPr>
@@ -5033,7 +5010,7 @@
       </p:sp>
       <p:sp>
         <p:nvSpPr>
-          <p:cNvPr id="39" name="Rectangle 38"/>
+          <p:cNvPr id="38" name="Rectangle 37"/>
           <p:cNvSpPr/>
           <p:nvPr/>
         </p:nvSpPr>
@@ -5074,7 +5051,7 @@
       </p:sp>
       <p:sp>
         <p:nvSpPr>
-          <p:cNvPr id="40" name="Rectangle 39"/>
+          <p:cNvPr id="39" name="Rectangle 38"/>
           <p:cNvSpPr/>
           <p:nvPr/>
         </p:nvSpPr>
@@ -5115,7 +5092,7 @@
       </p:sp>
       <p:sp>
         <p:nvSpPr>
-          <p:cNvPr id="41" name="TextBox 40"/>
+          <p:cNvPr id="40" name="TextBox 39"/>
           <p:cNvSpPr txBox="1"/>
           <p:nvPr/>
         </p:nvSpPr>
@@ -5157,7 +5134,7 @@
       </p:sp>
       <p:sp>
         <p:nvSpPr>
-          <p:cNvPr id="42" name="TextBox 41"/>
+          <p:cNvPr id="41" name="TextBox 40"/>
           <p:cNvSpPr txBox="1"/>
           <p:nvPr/>
         </p:nvSpPr>
@@ -5237,7 +5214,7 @@
       </p:sp>
       <p:sp>
         <p:nvSpPr>
-          <p:cNvPr id="43" name="Rectangle 42"/>
+          <p:cNvPr id="42" name="Rectangle 41"/>
           <p:cNvSpPr/>
           <p:nvPr/>
         </p:nvSpPr>
@@ -5280,7 +5257,7 @@
       </p:sp>
       <p:sp>
         <p:nvSpPr>
-          <p:cNvPr id="44" name="Rectangle 43"/>
+          <p:cNvPr id="43" name="Rectangle 42"/>
           <p:cNvSpPr/>
           <p:nvPr/>
         </p:nvSpPr>
@@ -5321,7 +5298,7 @@
       </p:sp>
       <p:sp>
         <p:nvSpPr>
-          <p:cNvPr id="45" name="Rectangle 44"/>
+          <p:cNvPr id="44" name="Rectangle 43"/>
           <p:cNvSpPr/>
           <p:nvPr/>
         </p:nvSpPr>
@@ -5362,7 +5339,7 @@
       </p:sp>
       <p:sp>
         <p:nvSpPr>
-          <p:cNvPr id="46" name="TextBox 45"/>
+          <p:cNvPr id="45" name="TextBox 44"/>
           <p:cNvSpPr txBox="1"/>
           <p:nvPr/>
         </p:nvSpPr>
@@ -5404,7 +5381,7 @@
       </p:sp>
       <p:sp>
         <p:nvSpPr>
-          <p:cNvPr id="47" name="TextBox 46"/>
+          <p:cNvPr id="46" name="TextBox 45"/>
           <p:cNvSpPr txBox="1"/>
           <p:nvPr/>
         </p:nvSpPr>
@@ -5484,7 +5461,7 @@
       </p:sp>
       <p:sp>
         <p:nvSpPr>
-          <p:cNvPr id="48" name="Rectangle 47"/>
+          <p:cNvPr id="47" name="Rectangle 46"/>
           <p:cNvSpPr/>
           <p:nvPr/>
         </p:nvSpPr>
@@ -5527,7 +5504,7 @@
       </p:sp>
       <p:sp>
         <p:nvSpPr>
-          <p:cNvPr id="49" name="Rectangle 48"/>
+          <p:cNvPr id="48" name="Rectangle 47"/>
           <p:cNvSpPr/>
           <p:nvPr/>
         </p:nvSpPr>
@@ -5568,7 +5545,7 @@
       </p:sp>
       <p:sp>
         <p:nvSpPr>
-          <p:cNvPr id="50" name="Rectangle 49"/>
+          <p:cNvPr id="49" name="Rectangle 48"/>
           <p:cNvSpPr/>
           <p:nvPr/>
         </p:nvSpPr>
@@ -5609,7 +5586,7 @@
       </p:sp>
       <p:sp>
         <p:nvSpPr>
-          <p:cNvPr id="51" name="TextBox 50"/>
+          <p:cNvPr id="50" name="TextBox 49"/>
           <p:cNvSpPr txBox="1"/>
           <p:nvPr/>
         </p:nvSpPr>
@@ -5651,7 +5628,7 @@
       </p:sp>
       <p:sp>
         <p:nvSpPr>
-          <p:cNvPr id="52" name="TextBox 51"/>
+          <p:cNvPr id="51" name="TextBox 50"/>
           <p:cNvSpPr txBox="1"/>
           <p:nvPr/>
         </p:nvSpPr>
@@ -5742,9 +5719,12 @@
   <p:cSld>
     <p:bg>
       <p:bgPr>
-        <a:solidFill>
-          <a:srgbClr val="FFFFFF"/>
-        </a:solidFill>
+        <a:blipFill>
+          <a:blip r:embed="rId2"/>
+          <a:stretch>
+            <a:fillRect/>
+          </a:stretch>
+        </a:blipFill>
         <a:effectLst/>
       </p:bgPr>
     </p:bg>
@@ -5755,35 +5735,9 @@
         <p:nvPr/>
       </p:nvGrpSpPr>
       <p:grpSpPr/>
-      <p:pic>
-        <p:nvPicPr>
-          <p:cNvPr id="2" name="Picture 1" descr="bg-p2.png"/>
-          <p:cNvPicPr>
-            <a:picLocks noChangeAspect="1"/>
-          </p:cNvPicPr>
-          <p:nvPr/>
-        </p:nvPicPr>
-        <p:blipFill>
-          <a:blip r:embed="rId2">
-            <a:alphaModFix amt="80000"/>
-          </a:blip>
-          <a:stretch>
-            <a:fillRect/>
-          </a:stretch>
-        </p:blipFill>
-        <p:spPr>
-          <a:xfrm>
-            <a:off x="0" y="0"/>
-            <a:ext cx="7556399" cy="10692000"/>
-          </a:xfrm>
-          <a:prstGeom prst="rect">
-            <a:avLst/>
-          </a:prstGeom>
-        </p:spPr>
-      </p:pic>
-      <p:sp>
-        <p:nvSpPr>
-          <p:cNvPr id="3" name="Rectangle 2"/>
+      <p:sp>
+        <p:nvSpPr>
+          <p:cNvPr id="2" name="Rectangle 1"/>
           <p:cNvSpPr/>
           <p:nvPr/>
         </p:nvSpPr>
@@ -5826,7 +5780,7 @@
       </p:sp>
       <p:sp>
         <p:nvSpPr>
-          <p:cNvPr id="4" name="Rectangle 3"/>
+          <p:cNvPr id="3" name="Rectangle 2"/>
           <p:cNvSpPr/>
           <p:nvPr/>
         </p:nvSpPr>
@@ -5867,7 +5821,7 @@
       </p:sp>
       <p:sp>
         <p:nvSpPr>
-          <p:cNvPr id="5" name="Rectangle 4"/>
+          <p:cNvPr id="4" name="Rectangle 3"/>
           <p:cNvSpPr/>
           <p:nvPr/>
         </p:nvSpPr>
@@ -5908,7 +5862,7 @@
       </p:sp>
       <p:sp>
         <p:nvSpPr>
-          <p:cNvPr id="6" name="TextBox 5"/>
+          <p:cNvPr id="5" name="TextBox 4"/>
           <p:cNvSpPr txBox="1"/>
           <p:nvPr/>
         </p:nvSpPr>
@@ -5950,7 +5904,7 @@
       </p:sp>
       <p:sp>
         <p:nvSpPr>
-          <p:cNvPr id="7" name="TextBox 6"/>
+          <p:cNvPr id="6" name="TextBox 5"/>
           <p:cNvSpPr txBox="1"/>
           <p:nvPr/>
         </p:nvSpPr>
@@ -6030,7 +5984,7 @@
       </p:sp>
       <p:sp>
         <p:nvSpPr>
-          <p:cNvPr id="8" name="Rectangle 7"/>
+          <p:cNvPr id="7" name="Rectangle 6"/>
           <p:cNvSpPr/>
           <p:nvPr/>
         </p:nvSpPr>
@@ -6073,7 +6027,7 @@
       </p:sp>
       <p:sp>
         <p:nvSpPr>
-          <p:cNvPr id="9" name="Rectangle 8"/>
+          <p:cNvPr id="8" name="Rectangle 7"/>
           <p:cNvSpPr/>
           <p:nvPr/>
         </p:nvSpPr>
@@ -6114,7 +6068,7 @@
       </p:sp>
       <p:sp>
         <p:nvSpPr>
-          <p:cNvPr id="10" name="Rectangle 9"/>
+          <p:cNvPr id="9" name="Rectangle 8"/>
           <p:cNvSpPr/>
           <p:nvPr/>
         </p:nvSpPr>
@@ -6155,7 +6109,7 @@
       </p:sp>
       <p:sp>
         <p:nvSpPr>
-          <p:cNvPr id="11" name="TextBox 10"/>
+          <p:cNvPr id="10" name="TextBox 9"/>
           <p:cNvSpPr txBox="1"/>
           <p:nvPr/>
         </p:nvSpPr>
@@ -6197,7 +6151,7 @@
       </p:sp>
       <p:sp>
         <p:nvSpPr>
-          <p:cNvPr id="12" name="TextBox 11"/>
+          <p:cNvPr id="11" name="TextBox 10"/>
           <p:cNvSpPr txBox="1"/>
           <p:nvPr/>
         </p:nvSpPr>
@@ -6277,7 +6231,7 @@
       </p:sp>
       <p:sp>
         <p:nvSpPr>
-          <p:cNvPr id="13" name="Rectangle 12"/>
+          <p:cNvPr id="12" name="Rectangle 11"/>
           <p:cNvSpPr/>
           <p:nvPr/>
         </p:nvSpPr>
@@ -6320,7 +6274,7 @@
       </p:sp>
       <p:sp>
         <p:nvSpPr>
-          <p:cNvPr id="14" name="Rectangle 13"/>
+          <p:cNvPr id="13" name="Rectangle 12"/>
           <p:cNvSpPr/>
           <p:nvPr/>
         </p:nvSpPr>
@@ -6361,7 +6315,7 @@
       </p:sp>
       <p:sp>
         <p:nvSpPr>
-          <p:cNvPr id="15" name="Rectangle 14"/>
+          <p:cNvPr id="14" name="Rectangle 13"/>
           <p:cNvSpPr/>
           <p:nvPr/>
         </p:nvSpPr>
@@ -6402,7 +6356,7 @@
       </p:sp>
       <p:sp>
         <p:nvSpPr>
-          <p:cNvPr id="16" name="TextBox 15"/>
+          <p:cNvPr id="15" name="TextBox 14"/>
           <p:cNvSpPr txBox="1"/>
           <p:nvPr/>
         </p:nvSpPr>
@@ -6444,7 +6398,7 @@
       </p:sp>
       <p:sp>
         <p:nvSpPr>
-          <p:cNvPr id="17" name="TextBox 16"/>
+          <p:cNvPr id="16" name="TextBox 15"/>
           <p:cNvSpPr txBox="1"/>
           <p:nvPr/>
         </p:nvSpPr>
@@ -6524,7 +6478,7 @@
       </p:sp>
       <p:sp>
         <p:nvSpPr>
-          <p:cNvPr id="18" name="Rectangle 17"/>
+          <p:cNvPr id="17" name="Rectangle 16"/>
           <p:cNvSpPr/>
           <p:nvPr/>
         </p:nvSpPr>
@@ -6567,7 +6521,7 @@
       </p:sp>
       <p:sp>
         <p:nvSpPr>
-          <p:cNvPr id="19" name="Rectangle 18"/>
+          <p:cNvPr id="18" name="Rectangle 17"/>
           <p:cNvSpPr/>
           <p:nvPr/>
         </p:nvSpPr>
@@ -6608,7 +6562,7 @@
       </p:sp>
       <p:sp>
         <p:nvSpPr>
-          <p:cNvPr id="20" name="Rectangle 19"/>
+          <p:cNvPr id="19" name="Rectangle 18"/>
           <p:cNvSpPr/>
           <p:nvPr/>
         </p:nvSpPr>
@@ -6649,7 +6603,7 @@
       </p:sp>
       <p:sp>
         <p:nvSpPr>
-          <p:cNvPr id="21" name="TextBox 20"/>
+          <p:cNvPr id="20" name="TextBox 19"/>
           <p:cNvSpPr txBox="1"/>
           <p:nvPr/>
         </p:nvSpPr>
@@ -6691,7 +6645,7 @@
       </p:sp>
       <p:sp>
         <p:nvSpPr>
-          <p:cNvPr id="22" name="TextBox 21"/>
+          <p:cNvPr id="21" name="TextBox 20"/>
           <p:cNvSpPr txBox="1"/>
           <p:nvPr/>
         </p:nvSpPr>
@@ -6771,7 +6725,7 @@
       </p:sp>
       <p:sp>
         <p:nvSpPr>
-          <p:cNvPr id="23" name="Rectangle 22"/>
+          <p:cNvPr id="22" name="Rectangle 21"/>
           <p:cNvSpPr/>
           <p:nvPr/>
         </p:nvSpPr>
@@ -6814,7 +6768,7 @@
       </p:sp>
       <p:sp>
         <p:nvSpPr>
-          <p:cNvPr id="24" name="Rectangle 23"/>
+          <p:cNvPr id="23" name="Rectangle 22"/>
           <p:cNvSpPr/>
           <p:nvPr/>
         </p:nvSpPr>
@@ -6855,7 +6809,7 @@
       </p:sp>
       <p:sp>
         <p:nvSpPr>
-          <p:cNvPr id="25" name="Rectangle 24"/>
+          <p:cNvPr id="24" name="Rectangle 23"/>
           <p:cNvSpPr/>
           <p:nvPr/>
         </p:nvSpPr>
@@ -6896,7 +6850,7 @@
       </p:sp>
       <p:sp>
         <p:nvSpPr>
-          <p:cNvPr id="26" name="TextBox 25"/>
+          <p:cNvPr id="25" name="TextBox 24"/>
           <p:cNvSpPr txBox="1"/>
           <p:nvPr/>
         </p:nvSpPr>
@@ -6938,7 +6892,7 @@
       </p:sp>
       <p:sp>
         <p:nvSpPr>
-          <p:cNvPr id="27" name="TextBox 26"/>
+          <p:cNvPr id="26" name="TextBox 25"/>
           <p:cNvSpPr txBox="1"/>
           <p:nvPr/>
         </p:nvSpPr>
@@ -7018,7 +6972,7 @@
       </p:sp>
       <p:sp>
         <p:nvSpPr>
-          <p:cNvPr id="28" name="Rectangle 27"/>
+          <p:cNvPr id="27" name="Rectangle 26"/>
           <p:cNvSpPr/>
           <p:nvPr/>
         </p:nvSpPr>
@@ -7059,7 +7013,7 @@
       </p:sp>
       <p:sp>
         <p:nvSpPr>
-          <p:cNvPr id="29" name="TextBox 28"/>
+          <p:cNvPr id="28" name="TextBox 27"/>
           <p:cNvSpPr txBox="1"/>
           <p:nvPr/>
         </p:nvSpPr>

--- a/assets/fiches/B5-fiche-complet.pptx
+++ b/assets/fiches/B5-fiche-complet.pptx
@@ -3156,7 +3156,7 @@
                 </a:solidFill>
                 <a:latin typeface="Arial"/>
               </a:rPr>
-              <a:t>Fiche Action | 1h48 | Guide d'animation — Conseillers Numériques CD47</a:t>
+              <a:t>Fiche Action | 2h04 | Guide d'animation — Conseillers Numériques CD47</a:t>
             </a:r>
           </a:p>
         </p:txBody>
@@ -3725,7 +3725,7 @@
                 </a:solidFill>
                 <a:latin typeface="Arial"/>
               </a:rPr>
-              <a:t>. Ce guide couvre toutes les étapes essentielles pour vous sentir à l'aise avec les services administratifs en ligne. Voici le programme :</a:t>
+              <a:t>. Ce guide couvre toutes les étapes essentielles pour vous sentir à l'aise avec les services administratifs_x000B_en ligne. Voici le programme :</a:t>
             </a:r>
           </a:p>
         </p:txBody>
@@ -4713,7 +4713,7 @@
                 </a:solidFill>
                 <a:latin typeface="Arial"/>
               </a:rPr>
-              <a:t>. Le site impots.gouv.fr vous permet de déclarer vos revenus, consulter vos avis d'imposition et gérer votre prélèvement à la source. Voici ce qu'il faut pour créer votre espace.</a:t>
+              <a:t>. Le site impots.gouv.fr vous permet de déclarer vos revenus, consulter vos avis d'imposition et gérer_x000B_votre prélèvement à la source. Voici ce qu'il faut pour créer votre espace.</a:t>
             </a:r>
           </a:p>
         </p:txBody>
@@ -4960,7 +4960,7 @@
                 </a:solidFill>
                 <a:latin typeface="Arial"/>
               </a:rPr>
-              <a:t>. Avant de créer vos espaces personnels, repérez ces numéros essentiels sur vos documents. Voici où les trouver facilement.</a:t>
+              <a:t>. Avant de créer vos espaces personnels, repérez ces numéros essentiels sur vos documents._x000B_Voici où les trouver facilement.</a:t>
             </a:r>
           </a:p>
         </p:txBody>
@@ -5207,7 +5207,7 @@
                 </a:solidFill>
                 <a:latin typeface="Arial"/>
               </a:rPr>
-              <a:t>. Ce que vous aurez besoin</a:t>
+              <a:t>. Ce dont vous aurez besoin</a:t>
             </a:r>
           </a:p>
         </p:txBody>
@@ -5701,7 +5701,7 @@
                 </a:solidFill>
                 <a:latin typeface="Arial"/>
               </a:rPr>
-              <a:t>. Votre mot de passe est la première barrière contre les accès non autorisés à vos données personnelles et financières. Prenez le temps de bien le choisir.</a:t>
+              <a:t>. Votre mot de passe est la première barrière contre les accès non autorisés à vos données personnelles et financières._x000B_Prenez le temps de bien le choisir.</a:t>
             </a:r>
           </a:p>
         </p:txBody>
@@ -6718,7 +6718,7 @@
                 </a:solidFill>
                 <a:latin typeface="Arial"/>
               </a:rPr>
-              <a:t>. Maintenant que votre espace est créé, voici quelques habitudes simples pour l'utiliser en toute sécurité et en tirer le meilleur parti :</a:t>
+              <a:t>. Maintenant que votre espace est créé, voici quelques habitudes simples pour l'utiliser en toute sécurité_x000B_et en tirer le meilleur parti :</a:t>
             </a:r>
           </a:p>
         </p:txBody>
@@ -6978,6 +6978,500 @@
         </p:nvSpPr>
         <p:spPr>
           <a:xfrm>
+            <a:off x="529200" y="4284000"/>
+            <a:ext cx="6498000" cy="748800"/>
+          </a:xfrm>
+          <a:prstGeom prst="rect">
+            <a:avLst/>
+          </a:prstGeom>
+          <a:solidFill>
+            <a:srgbClr val="F8F9FD"/>
+          </a:solidFill>
+          <a:ln w="6350">
+            <a:solidFill>
+              <a:srgbClr val="DDE6ED"/>
+            </a:solidFill>
+          </a:ln>
+        </p:spPr>
+        <p:style>
+          <a:lnRef idx="1">
+            <a:schemeClr val="accent1"/>
+          </a:lnRef>
+          <a:fillRef idx="3">
+            <a:schemeClr val="accent1"/>
+          </a:fillRef>
+          <a:effectRef idx="2">
+            <a:schemeClr val="accent1"/>
+          </a:effectRef>
+          <a:fontRef idx="minor">
+            <a:schemeClr val="lt1"/>
+          </a:fontRef>
+        </p:style>
+        <p:txBody>
+          <a:bodyPr rtlCol="0" anchor="ctr"/>
+          <a:lstStyle/>
+          <a:p/>
+        </p:txBody>
+      </p:sp>
+      <p:sp>
+        <p:nvSpPr>
+          <p:cNvPr id="28" name="Rectangle 27"/>
+          <p:cNvSpPr/>
+          <p:nvPr/>
+        </p:nvSpPr>
+        <p:spPr>
+          <a:xfrm>
+            <a:off x="529200" y="4284000"/>
+            <a:ext cx="198000" cy="748800"/>
+          </a:xfrm>
+          <a:prstGeom prst="rect">
+            <a:avLst/>
+          </a:prstGeom>
+          <a:solidFill>
+            <a:srgbClr val="187C88"/>
+          </a:solidFill>
+          <a:ln>
+            <a:noFill/>
+          </a:ln>
+        </p:spPr>
+        <p:style>
+          <a:lnRef idx="1">
+            <a:schemeClr val="accent1"/>
+          </a:lnRef>
+          <a:fillRef idx="3">
+            <a:schemeClr val="accent1"/>
+          </a:fillRef>
+          <a:effectRef idx="2">
+            <a:schemeClr val="accent1"/>
+          </a:effectRef>
+          <a:fontRef idx="minor">
+            <a:schemeClr val="lt1"/>
+          </a:fontRef>
+        </p:style>
+        <p:txBody>
+          <a:bodyPr rtlCol="0" anchor="ctr"/>
+          <a:lstStyle/>
+          <a:p/>
+        </p:txBody>
+      </p:sp>
+      <p:sp>
+        <p:nvSpPr>
+          <p:cNvPr id="29" name="Rectangle 28"/>
+          <p:cNvSpPr/>
+          <p:nvPr/>
+        </p:nvSpPr>
+        <p:spPr>
+          <a:xfrm>
+            <a:off x="763200" y="4579200"/>
+            <a:ext cx="468000" cy="158400"/>
+          </a:xfrm>
+          <a:prstGeom prst="rect">
+            <a:avLst/>
+          </a:prstGeom>
+          <a:solidFill>
+            <a:srgbClr val="187C88"/>
+          </a:solidFill>
+          <a:ln>
+            <a:noFill/>
+          </a:ln>
+        </p:spPr>
+        <p:style>
+          <a:lnRef idx="1">
+            <a:schemeClr val="accent1"/>
+          </a:lnRef>
+          <a:fillRef idx="3">
+            <a:schemeClr val="accent1"/>
+          </a:fillRef>
+          <a:effectRef idx="2">
+            <a:schemeClr val="accent1"/>
+          </a:effectRef>
+          <a:fontRef idx="minor">
+            <a:schemeClr val="lt1"/>
+          </a:fontRef>
+        </p:style>
+        <p:txBody>
+          <a:bodyPr rtlCol="0" anchor="ctr"/>
+          <a:lstStyle/>
+          <a:p/>
+        </p:txBody>
+      </p:sp>
+      <p:sp>
+        <p:nvSpPr>
+          <p:cNvPr id="30" name="TextBox 29"/>
+          <p:cNvSpPr txBox="1"/>
+          <p:nvPr/>
+        </p:nvSpPr>
+        <p:spPr>
+          <a:xfrm>
+            <a:off x="763200" y="4579200"/>
+            <a:ext cx="468000" cy="158400"/>
+          </a:xfrm>
+          <a:prstGeom prst="rect">
+            <a:avLst/>
+          </a:prstGeom>
+          <a:noFill/>
+        </p:spPr>
+        <p:txBody>
+          <a:bodyPr wrap="square" tIns="0" bIns="0" lIns="18000" rIns="18000">
+            <a:spAutoFit/>
+          </a:bodyPr>
+          <a:lstStyle/>
+          <a:p>
+            <a:pPr algn="ctr">
+              <a:spcBef>
+                <a:spcPts val="0"/>
+              </a:spcBef>
+              <a:spcAft>
+                <a:spcPts val="100"/>
+              </a:spcAft>
+            </a:pPr>
+            <a:r>
+              <a:rPr sz="800" b="1" i="0">
+                <a:solidFill>
+                  <a:srgbClr val="FFFFFF"/>
+                </a:solidFill>
+                <a:latin typeface="Arial"/>
+              </a:rPr>
+              <a:t>1:48</a:t>
+            </a:r>
+          </a:p>
+        </p:txBody>
+      </p:sp>
+      <p:sp>
+        <p:nvSpPr>
+          <p:cNvPr id="31" name="TextBox 30"/>
+          <p:cNvSpPr txBox="1"/>
+          <p:nvPr/>
+        </p:nvSpPr>
+        <p:spPr>
+          <a:xfrm>
+            <a:off x="1303200" y="4348800"/>
+            <a:ext cx="5652000" cy="655200"/>
+          </a:xfrm>
+          <a:prstGeom prst="rect">
+            <a:avLst/>
+          </a:prstGeom>
+          <a:noFill/>
+        </p:spPr>
+        <p:txBody>
+          <a:bodyPr wrap="square" tIns="0" bIns="0" lIns="18000" rIns="18000">
+            <a:spAutoFit/>
+          </a:bodyPr>
+          <a:lstStyle/>
+          <a:p>
+            <a:pPr algn="l">
+              <a:spcBef>
+                <a:spcPts val="0"/>
+              </a:spcBef>
+              <a:spcAft>
+                <a:spcPts val="100"/>
+              </a:spcAft>
+            </a:pPr>
+            <a:r>
+              <a:rPr sz="800" b="1" i="0">
+                <a:solidFill>
+                  <a:srgbClr val="187C88"/>
+                </a:solidFill>
+                <a:latin typeface="Arial"/>
+              </a:rPr>
+              <a:t>8 min</a:t>
+            </a:r>
+          </a:p>
+          <a:p>
+            <a:pPr algn="l">
+              <a:spcBef>
+                <a:spcPts val="0"/>
+              </a:spcBef>
+              <a:spcAft>
+                <a:spcPts val="100"/>
+              </a:spcAft>
+            </a:pPr>
+            <a:r>
+              <a:rPr sz="900" b="1" i="0">
+                <a:solidFill>
+                  <a:srgbClr val="2B2B2B"/>
+                </a:solidFill>
+                <a:latin typeface="Arial"/>
+              </a:rPr>
+              <a:t>Offre départementale d’Inclusion Numérique</a:t>
+            </a:r>
+          </a:p>
+          <a:p>
+            <a:pPr algn="l">
+              <a:spcBef>
+                <a:spcPts val="0"/>
+              </a:spcBef>
+              <a:spcAft>
+                <a:spcPts val="100"/>
+              </a:spcAft>
+            </a:pPr>
+            <a:r>
+              <a:rPr sz="800" b="0" i="0">
+                <a:solidFill>
+                  <a:srgbClr val="2B2B2B"/>
+                </a:solidFill>
+                <a:latin typeface="Arial"/>
+              </a:rPr>
+              <a:t>. Voici les 5 offres et services dispensés par l’équipe départementale</a:t>
+            </a:r>
+          </a:p>
+        </p:txBody>
+      </p:sp>
+      <p:sp>
+        <p:nvSpPr>
+          <p:cNvPr id="32" name="Rectangle 31"/>
+          <p:cNvSpPr/>
+          <p:nvPr/>
+        </p:nvSpPr>
+        <p:spPr>
+          <a:xfrm>
+            <a:off x="529200" y="5032800"/>
+            <a:ext cx="6498000" cy="748800"/>
+          </a:xfrm>
+          <a:prstGeom prst="rect">
+            <a:avLst/>
+          </a:prstGeom>
+          <a:solidFill>
+            <a:srgbClr val="F8F9FD"/>
+          </a:solidFill>
+          <a:ln w="6350">
+            <a:solidFill>
+              <a:srgbClr val="DDE6ED"/>
+            </a:solidFill>
+          </a:ln>
+        </p:spPr>
+        <p:style>
+          <a:lnRef idx="1">
+            <a:schemeClr val="accent1"/>
+          </a:lnRef>
+          <a:fillRef idx="3">
+            <a:schemeClr val="accent1"/>
+          </a:fillRef>
+          <a:effectRef idx="2">
+            <a:schemeClr val="accent1"/>
+          </a:effectRef>
+          <a:fontRef idx="minor">
+            <a:schemeClr val="lt1"/>
+          </a:fontRef>
+        </p:style>
+        <p:txBody>
+          <a:bodyPr rtlCol="0" anchor="ctr"/>
+          <a:lstStyle/>
+          <a:p/>
+        </p:txBody>
+      </p:sp>
+      <p:sp>
+        <p:nvSpPr>
+          <p:cNvPr id="33" name="Rectangle 32"/>
+          <p:cNvSpPr/>
+          <p:nvPr/>
+        </p:nvSpPr>
+        <p:spPr>
+          <a:xfrm>
+            <a:off x="529200" y="5032800"/>
+            <a:ext cx="198000" cy="748800"/>
+          </a:xfrm>
+          <a:prstGeom prst="rect">
+            <a:avLst/>
+          </a:prstGeom>
+          <a:solidFill>
+            <a:srgbClr val="4388BC"/>
+          </a:solidFill>
+          <a:ln>
+            <a:noFill/>
+          </a:ln>
+        </p:spPr>
+        <p:style>
+          <a:lnRef idx="1">
+            <a:schemeClr val="accent1"/>
+          </a:lnRef>
+          <a:fillRef idx="3">
+            <a:schemeClr val="accent1"/>
+          </a:fillRef>
+          <a:effectRef idx="2">
+            <a:schemeClr val="accent1"/>
+          </a:effectRef>
+          <a:fontRef idx="minor">
+            <a:schemeClr val="lt1"/>
+          </a:fontRef>
+        </p:style>
+        <p:txBody>
+          <a:bodyPr rtlCol="0" anchor="ctr"/>
+          <a:lstStyle/>
+          <a:p/>
+        </p:txBody>
+      </p:sp>
+      <p:sp>
+        <p:nvSpPr>
+          <p:cNvPr id="34" name="Rectangle 33"/>
+          <p:cNvSpPr/>
+          <p:nvPr/>
+        </p:nvSpPr>
+        <p:spPr>
+          <a:xfrm>
+            <a:off x="763200" y="5328000"/>
+            <a:ext cx="468000" cy="158400"/>
+          </a:xfrm>
+          <a:prstGeom prst="rect">
+            <a:avLst/>
+          </a:prstGeom>
+          <a:solidFill>
+            <a:srgbClr val="4388BC"/>
+          </a:solidFill>
+          <a:ln>
+            <a:noFill/>
+          </a:ln>
+        </p:spPr>
+        <p:style>
+          <a:lnRef idx="1">
+            <a:schemeClr val="accent1"/>
+          </a:lnRef>
+          <a:fillRef idx="3">
+            <a:schemeClr val="accent1"/>
+          </a:fillRef>
+          <a:effectRef idx="2">
+            <a:schemeClr val="accent1"/>
+          </a:effectRef>
+          <a:fontRef idx="minor">
+            <a:schemeClr val="lt1"/>
+          </a:fontRef>
+        </p:style>
+        <p:txBody>
+          <a:bodyPr rtlCol="0" anchor="ctr"/>
+          <a:lstStyle/>
+          <a:p/>
+        </p:txBody>
+      </p:sp>
+      <p:sp>
+        <p:nvSpPr>
+          <p:cNvPr id="35" name="TextBox 34"/>
+          <p:cNvSpPr txBox="1"/>
+          <p:nvPr/>
+        </p:nvSpPr>
+        <p:spPr>
+          <a:xfrm>
+            <a:off x="763200" y="5328000"/>
+            <a:ext cx="468000" cy="158400"/>
+          </a:xfrm>
+          <a:prstGeom prst="rect">
+            <a:avLst/>
+          </a:prstGeom>
+          <a:noFill/>
+        </p:spPr>
+        <p:txBody>
+          <a:bodyPr wrap="square" tIns="0" bIns="0" lIns="18000" rIns="18000">
+            <a:spAutoFit/>
+          </a:bodyPr>
+          <a:lstStyle/>
+          <a:p>
+            <a:pPr algn="ctr">
+              <a:spcBef>
+                <a:spcPts val="0"/>
+              </a:spcBef>
+              <a:spcAft>
+                <a:spcPts val="100"/>
+              </a:spcAft>
+            </a:pPr>
+            <a:r>
+              <a:rPr sz="800" b="1" i="0">
+                <a:solidFill>
+                  <a:srgbClr val="FFFFFF"/>
+                </a:solidFill>
+                <a:latin typeface="Arial"/>
+              </a:rPr>
+              <a:t>1:56</a:t>
+            </a:r>
+          </a:p>
+        </p:txBody>
+      </p:sp>
+      <p:sp>
+        <p:nvSpPr>
+          <p:cNvPr id="36" name="TextBox 35"/>
+          <p:cNvSpPr txBox="1"/>
+          <p:nvPr/>
+        </p:nvSpPr>
+        <p:spPr>
+          <a:xfrm>
+            <a:off x="1303200" y="5097600"/>
+            <a:ext cx="5652000" cy="655200"/>
+          </a:xfrm>
+          <a:prstGeom prst="rect">
+            <a:avLst/>
+          </a:prstGeom>
+          <a:noFill/>
+        </p:spPr>
+        <p:txBody>
+          <a:bodyPr wrap="square" tIns="0" bIns="0" lIns="18000" rIns="18000">
+            <a:spAutoFit/>
+          </a:bodyPr>
+          <a:lstStyle/>
+          <a:p>
+            <a:pPr algn="l">
+              <a:spcBef>
+                <a:spcPts val="0"/>
+              </a:spcBef>
+              <a:spcAft>
+                <a:spcPts val="100"/>
+              </a:spcAft>
+            </a:pPr>
+            <a:r>
+              <a:rPr sz="800" b="1" i="0">
+                <a:solidFill>
+                  <a:srgbClr val="4388BC"/>
+                </a:solidFill>
+                <a:latin typeface="Arial"/>
+              </a:rPr>
+              <a:t>8 min</a:t>
+            </a:r>
+          </a:p>
+          <a:p>
+            <a:pPr algn="l">
+              <a:spcBef>
+                <a:spcPts val="0"/>
+              </a:spcBef>
+              <a:spcAft>
+                <a:spcPts val="100"/>
+              </a:spcAft>
+            </a:pPr>
+            <a:r>
+              <a:rPr sz="900" b="1" i="0">
+                <a:solidFill>
+                  <a:srgbClr val="2B2B2B"/>
+                </a:solidFill>
+                <a:latin typeface="Arial"/>
+              </a:rPr>
+              <a:t>Besoin d'aide ? Nous sommes là !</a:t>
+            </a:r>
+          </a:p>
+          <a:p>
+            <a:pPr algn="l">
+              <a:spcBef>
+                <a:spcPts val="0"/>
+              </a:spcBef>
+              <a:spcAft>
+                <a:spcPts val="100"/>
+              </a:spcAft>
+            </a:pPr>
+            <a:r>
+              <a:rPr sz="800" b="0" i="0">
+                <a:solidFill>
+                  <a:srgbClr val="2B2B2B"/>
+                </a:solidFill>
+                <a:latin typeface="Arial"/>
+              </a:rPr>
+              <a:t>. Pour nous joindre</a:t>
+            </a:r>
+          </a:p>
+        </p:txBody>
+      </p:sp>
+      <p:sp>
+        <p:nvSpPr>
+          <p:cNvPr id="37" name="Rectangle 36"/>
+          <p:cNvSpPr/>
+          <p:nvPr/>
+        </p:nvSpPr>
+        <p:spPr>
+          <a:xfrm>
             <a:off x="529200" y="9684000"/>
             <a:ext cx="6498000" cy="43200"/>
           </a:xfrm>
@@ -7013,7 +7507,7 @@
       </p:sp>
       <p:sp>
         <p:nvSpPr>
-          <p:cNvPr id="28" name="TextBox 27"/>
+          <p:cNvPr id="38" name="TextBox 37"/>
           <p:cNvSpPr txBox="1"/>
           <p:nvPr/>
         </p:nvSpPr>
